--- a/slides/computerScience_day1.pptx
+++ b/slides/computerScience_day1.pptx
@@ -7961,7 +7961,7 @@
         </p:spPr>
         <p:txBody>
           <a:bodyPr>
-            <a:normAutofit/>
+            <a:normAutofit lnSpcReduction="10000"/>
           </a:bodyPr>
           <a:lstStyle/>
           <a:p>
@@ -8129,6 +8129,14 @@
               <a:rPr kumimoji="1" lang="ja-JP" altLang="en-US" dirty="0"/>
               <a:t>に行ってください。</a:t>
             </a:r>
+            <a:endParaRPr kumimoji="1" lang="en-US" altLang="ja-JP" dirty="0"/>
+          </a:p>
+          <a:p>
+            <a:r>
+              <a:rPr kumimoji="1" lang="ja-JP" altLang="en-US"/>
+              <a:t>質問等も課題ページのチャット機能で受け付けます</a:t>
+            </a:r>
+            <a:endParaRPr kumimoji="1" lang="ja-JP" altLang="en-US" dirty="0"/>
           </a:p>
           <a:p>
             <a:pPr lvl="1"/>
@@ -9162,7 +9170,7 @@
             <a:pPr lvl="2"/>
             <a:r>
               <a:rPr lang="ja-JP" altLang="en-US" dirty="0"/>
-              <a:t>プログラミングが苦手な人はこの確認問題ができるようになりましょう</a:t>
+              <a:t>プログラミングが苦手な人はこの確認問題ができるラインを目指しましょう</a:t>
             </a:r>
             <a:endParaRPr kumimoji="1" lang="ja-JP" altLang="en-US" dirty="0"/>
           </a:p>
